--- a/docs/reports/台灣產業趨勢監測週報_2026-09-07_2026-09-14.pptx
+++ b/docs/reports/台灣產業趨勢監測週報_2026-09-07_2026-09-14.pptx
@@ -183,37 +183,37 @@
                 <c:formatCode>General</c:formatCode>
                 <c:ptCount val="11"/>
                 <c:pt idx="0">
-                  <c:v>44</c:v>
+                  <c:v>46</c:v>
                 </c:pt>
                 <c:pt idx="1">
-                  <c:v>119</c:v>
+                  <c:v>126</c:v>
                 </c:pt>
                 <c:pt idx="2">
-                  <c:v>208</c:v>
+                  <c:v>213</c:v>
                 </c:pt>
                 <c:pt idx="3">
-                  <c:v>259</c:v>
+                  <c:v>271</c:v>
                 </c:pt>
                 <c:pt idx="4">
-                  <c:v>302</c:v>
+                  <c:v>315</c:v>
                 </c:pt>
                 <c:pt idx="5">
-                  <c:v>309</c:v>
+                  <c:v>332</c:v>
                 </c:pt>
                 <c:pt idx="6">
-                  <c:v>319</c:v>
+                  <c:v>333</c:v>
                 </c:pt>
                 <c:pt idx="7">
-                  <c:v>373</c:v>
+                  <c:v>385</c:v>
                 </c:pt>
                 <c:pt idx="8">
-                  <c:v>780</c:v>
+                  <c:v>814</c:v>
                 </c:pt>
                 <c:pt idx="9">
-                  <c:v>897</c:v>
+                  <c:v>936</c:v>
                 </c:pt>
                 <c:pt idx="10">
-                  <c:v>1080</c:v>
+                  <c:v>1108</c:v>
                 </c:pt>
               </c:numCache>
             </c:numRef>
@@ -335,7 +335,7 @@
                   <c:v>27</c:v>
                 </c:pt>
                 <c:pt idx="2">
-                  <c:v>12</c:v>
+                  <c:v>13</c:v>
                 </c:pt>
                 <c:pt idx="3">
                   <c:v>11</c:v>
@@ -538,13 +538,13 @@
                 <c:formatCode>General</c:formatCode>
                 <c:ptCount val="6"/>
                 <c:pt idx="0">
-                  <c:v>176</c:v>
+                  <c:v>184</c:v>
                 </c:pt>
                 <c:pt idx="1">
+                  <c:v>83</c:v>
+                </c:pt>
+                <c:pt idx="2">
                   <c:v>78</c:v>
-                </c:pt>
-                <c:pt idx="2">
-                  <c:v>75</c:v>
                 </c:pt>
                 <c:pt idx="3">
                   <c:v>55</c:v>
@@ -3705,7 +3705,7 @@
           </a:p>
           <a:p>
             <a:r>
-              <a:t>產出:2026-09-14 13:40(台北時間)</a:t>
+              <a:t>產出:2026-09-14 17:52(台北時間)</a:t>
             </a:r>
           </a:p>
           <a:p>
@@ -3773,7 +3773,7 @@
               <a:defRPr sz="1600"/>
             </a:pPr>
             <a:r>
-              <a:t>本期共蒐集 9564 篇公開報導,可歸類 4690 篇</a:t>
+              <a:t>本期共蒐集 9938 篇公開報導,可歸類 4879 篇</a:t>
             </a:r>
           </a:p>
           <a:p>
@@ -3781,7 +3781,7 @@
               <a:defRPr sz="1600"/>
             </a:pPr>
             <a:r>
-              <a:t>高科技製造業:1080 篇(佔可歸類 23.0%)</a:t>
+              <a:t>高科技製造業:1108 篇(佔可歸類 22.7%)</a:t>
             </a:r>
           </a:p>
           <a:p>
@@ -3789,7 +3789,7 @@
               <a:defRPr sz="1600"/>
             </a:pPr>
             <a:r>
-              <a:t>政府教育單位:897 篇(佔可歸類 19.1%)</a:t>
+              <a:t>政府教育單位:936 篇(佔可歸類 19.2%)</a:t>
             </a:r>
           </a:p>
           <a:p>
@@ -3797,7 +3797,7 @@
               <a:defRPr sz="1600"/>
             </a:pPr>
             <a:r>
-              <a:t>金融業:780 篇(佔可歸類 16.6%)</a:t>
+              <a:t>金融業:814 篇(佔可歸類 16.7%)</a:t>
             </a:r>
           </a:p>
           <a:p>
@@ -3805,7 +3805,7 @@
               <a:defRPr sz="1600"/>
             </a:pPr>
             <a:r>
-              <a:t>最熱主題:AI 與自動化(894 篇)、利率與資金環境(369 篇)、地緣政治與供應鏈(296 篇)</a:t>
+              <a:t>最熱主題:AI 與自動化(940 篇)、利率與資金環境(385 篇)、地緣政治與供應鏈(312 篇)</a:t>
             </a:r>
           </a:p>
           <a:p>
@@ -3909,7 +3909,7 @@
           <a:lstStyle/>
           <a:p>
             <a:r>
-              <a:t>競品聲量對比(SOV)— 電腦品牌(合計 107 篇)</a:t>
+              <a:t>競品聲量對比(SOV)— 電腦品牌(合計 108 篇)</a:t>
             </a:r>
           </a:p>
         </p:txBody>
@@ -3966,7 +3966,7 @@
           <a:lstStyle/>
           <a:p>
             <a:r>
-              <a:t>競品聲量對比(SOV)— 半導體(合計 433 篇)</a:t>
+              <a:t>競品聲量對比(SOV)— 半導體(合計 449 篇)</a:t>
             </a:r>
           </a:p>
         </p:txBody>
@@ -4047,7 +4047,7 @@
               <a:defRPr sz="1600"/>
             </a:pPr>
             <a:r>
-              <a:t>foodpanda:疑似負面 9 篇(命中:罰鍰、違法、違規)</a:t>
+              <a:t>foodpanda:疑似負面 10 篇(命中:罰鍰、違法、違規)</a:t>
             </a:r>
           </a:p>
           <a:p>
@@ -4055,7 +4055,7 @@
               <a:defRPr sz="1600"/>
             </a:pPr>
             <a:r>
-              <a:t>Google:疑似負面 8 篇(命中:抵制、罰款、裁員、駭客)</a:t>
+              <a:t>Meta:疑似負面 8 篇(命中:工安、詐欺、詐騙、起訴)</a:t>
             </a:r>
           </a:p>
           <a:p>
@@ -4063,7 +4063,7 @@
               <a:defRPr sz="1600"/>
             </a:pPr>
             <a:r>
-              <a:t>蘋果:疑似負面 7 篇(命中:下架、停工、抄襲、缺陷)</a:t>
+              <a:t>Google:疑似負面 8 篇(命中:抵制、罰款、裁員、駭客)</a:t>
             </a:r>
           </a:p>
           <a:p>
@@ -4071,7 +4071,7 @@
               <a:defRPr sz="1600"/>
             </a:pPr>
             <a:r>
-              <a:t>Meta:疑似負面 7 篇(命中:工安、詐欺、詐騙、跳票)</a:t>
+              <a:t>蘋果:疑似負面 7 篇(命中:下架、停工、抄襲、缺陷)</a:t>
             </a:r>
           </a:p>
           <a:p>

--- a/docs/reports/台灣產業趨勢監測週報_2026-09-07_2026-09-14.pptx
+++ b/docs/reports/台灣產業趨勢監測週報_2026-09-07_2026-09-14.pptx
@@ -156,10 +156,10 @@
                   <c:v>專業科學及技術服務業</c:v>
                 </c:pt>
                 <c:pt idx="5">
+                  <c:v>資通訊業</c:v>
+                </c:pt>
+                <c:pt idx="6">
                   <c:v>服務業</c:v>
-                </c:pt>
-                <c:pt idx="6">
-                  <c:v>資通訊業</c:v>
                 </c:pt>
                 <c:pt idx="7">
                   <c:v>醫療保健業</c:v>
@@ -183,37 +183,37 @@
                 <c:formatCode>General</c:formatCode>
                 <c:ptCount val="11"/>
                 <c:pt idx="0">
-                  <c:v>46</c:v>
+                  <c:v>49</c:v>
                 </c:pt>
                 <c:pt idx="1">
-                  <c:v>126</c:v>
+                  <c:v>128</c:v>
                 </c:pt>
                 <c:pt idx="2">
                   <c:v>213</c:v>
                 </c:pt>
                 <c:pt idx="3">
-                  <c:v>271</c:v>
+                  <c:v>280</c:v>
                 </c:pt>
                 <c:pt idx="4">
-                  <c:v>315</c:v>
+                  <c:v>323</c:v>
                 </c:pt>
                 <c:pt idx="5">
-                  <c:v>332</c:v>
+                  <c:v>339</c:v>
                 </c:pt>
                 <c:pt idx="6">
-                  <c:v>333</c:v>
+                  <c:v>347</c:v>
                 </c:pt>
                 <c:pt idx="7">
-                  <c:v>385</c:v>
+                  <c:v>390</c:v>
                 </c:pt>
                 <c:pt idx="8">
-                  <c:v>814</c:v>
+                  <c:v>835</c:v>
                 </c:pt>
                 <c:pt idx="9">
-                  <c:v>936</c:v>
+                  <c:v>956</c:v>
                 </c:pt>
                 <c:pt idx="10">
-                  <c:v>1108</c:v>
+                  <c:v>1139</c:v>
                 </c:pt>
               </c:numCache>
             </c:numRef>
@@ -329,10 +329,10 @@
                 <c:formatCode>General</c:formatCode>
                 <c:ptCount val="7"/>
                 <c:pt idx="0">
-                  <c:v>33</c:v>
+                  <c:v>34</c:v>
                 </c:pt>
                 <c:pt idx="1">
-                  <c:v>27</c:v>
+                  <c:v>28</c:v>
                 </c:pt>
                 <c:pt idx="2">
                   <c:v>13</c:v>
@@ -538,13 +538,13 @@
                 <c:formatCode>General</c:formatCode>
                 <c:ptCount val="6"/>
                 <c:pt idx="0">
-                  <c:v>184</c:v>
+                  <c:v>187</c:v>
                 </c:pt>
                 <c:pt idx="1">
                   <c:v>83</c:v>
                 </c:pt>
                 <c:pt idx="2">
-                  <c:v>78</c:v>
+                  <c:v>82</c:v>
                 </c:pt>
                 <c:pt idx="3">
                   <c:v>55</c:v>
@@ -553,7 +553,7 @@
                   <c:v>28</c:v>
                 </c:pt>
                 <c:pt idx="5">
-                  <c:v>21</c:v>
+                  <c:v>22</c:v>
                 </c:pt>
               </c:numCache>
             </c:numRef>
@@ -3705,7 +3705,7 @@
           </a:p>
           <a:p>
             <a:r>
-              <a:t>產出:2026-09-14 17:52(台北時間)</a:t>
+              <a:t>產出:2026-09-14 19:00(台北時間)</a:t>
             </a:r>
           </a:p>
           <a:p>
@@ -3773,7 +3773,7 @@
               <a:defRPr sz="1600"/>
             </a:pPr>
             <a:r>
-              <a:t>本期共蒐集 9938 篇公開報導,可歸類 4879 篇</a:t>
+              <a:t>本期共蒐集 10145 篇公開報導,可歸類 4999 篇</a:t>
             </a:r>
           </a:p>
           <a:p>
@@ -3781,7 +3781,7 @@
               <a:defRPr sz="1600"/>
             </a:pPr>
             <a:r>
-              <a:t>高科技製造業:1108 篇(佔可歸類 22.7%)</a:t>
+              <a:t>高科技製造業:1139 篇(佔可歸類 22.8%)</a:t>
             </a:r>
           </a:p>
           <a:p>
@@ -3789,7 +3789,7 @@
               <a:defRPr sz="1600"/>
             </a:pPr>
             <a:r>
-              <a:t>政府教育單位:936 篇(佔可歸類 19.2%)</a:t>
+              <a:t>政府教育單位:956 篇(佔可歸類 19.1%)</a:t>
             </a:r>
           </a:p>
           <a:p>
@@ -3797,7 +3797,7 @@
               <a:defRPr sz="1600"/>
             </a:pPr>
             <a:r>
-              <a:t>金融業:814 篇(佔可歸類 16.7%)</a:t>
+              <a:t>金融業:835 篇(佔可歸類 16.7%)</a:t>
             </a:r>
           </a:p>
           <a:p>
@@ -3805,7 +3805,7 @@
               <a:defRPr sz="1600"/>
             </a:pPr>
             <a:r>
-              <a:t>最熱主題:AI 與自動化(940 篇)、利率與資金環境(385 篇)、地緣政治與供應鏈(312 篇)</a:t>
+              <a:t>最熱主題:AI 與自動化(968 篇)、利率與資金環境(393 篇)、地緣政治與供應鏈(319 篇)</a:t>
             </a:r>
           </a:p>
           <a:p>
@@ -3909,7 +3909,7 @@
           <a:lstStyle/>
           <a:p>
             <a:r>
-              <a:t>競品聲量對比(SOV)— 電腦品牌(合計 108 篇)</a:t>
+              <a:t>競品聲量對比(SOV)— 電腦品牌(合計 110 篇)</a:t>
             </a:r>
           </a:p>
         </p:txBody>
@@ -3966,7 +3966,7 @@
           <a:lstStyle/>
           <a:p>
             <a:r>
-              <a:t>競品聲量對比(SOV)— 半導體(合計 449 篇)</a:t>
+              <a:t>競品聲量對比(SOV)— 半導體(合計 457 篇)</a:t>
             </a:r>
           </a:p>
         </p:txBody>
